--- a/src/Documento_Final/Rev1__Tesis_Sistemas_Uniandes_2/Poster_Tesis_HFL_v7_Uniandes.pptx
+++ b/src/Documento_Final/Rev1__Tesis_Sistemas_Uniandes_2/Poster_Tesis_HFL_v7_Uniandes.pptx
@@ -16835,7 +16835,7 @@
           <a:p>
             <a:r>
               <a:rPr lang="es-CO"/>
-              <a:t>Se disena, implementa y evalua un Sistema de Deteccion de Intrusiones (IDS) para trafico IoT/MQTT desplegado sobre una arquitectura jerarquica Edge-Fog-Cloud (ESP32-S3 + Raspberry Pi 4 + PC). Los nodos edge ejecutan inferencia TinyML sobre 13 features de flujo y publican datos al gateway; el gateway entrena localmente y reporta pesos al PC, que coordina rondas de FedAvg. Todas las comunicaciones MQTT/HTTP se protegen con ASCON-128 (estandar NIST de criptografia ligera). Se comparan cuatro variantes (RN+ASCON, RN sin ASCON, CNN-1D, FOG con lider/peer) y se cuantifica el overhead de seguridad sobre el ciclo federado. Resultados: accuracy global de 0.946 (RN+ASCON) y 0.975 (CNN+FOG), con un overhead temporal de ASCON inferior al 0.1% del tiempo de ronda y un costo de tamano del 36% por mensaje, validando una arquitectura operativa, replicable y segura para IDS IoT.</a:t>
+              <a:t>Se disena, implementa y evalua un Sistema de Deteccion de Intrusiones (IDS) para trafico IoT/MQTT desplegado sobre una arquitectura jerarquica Edge-Fog-Cloud (ESP32-S3 + Raspberry Pi 4 + PC). Los nodos edge ejecutan inferencia TinyML sobre 13 features de flujo y publican datos al gateway; el gateway entrena localmente y reporta pesos al PC, que coordina rondas de FedAvg. Todas las comunicaciones MQTT/HTTP se protegen con ASCON-128 (estandar NIST de criptografia ligera). Se comparan ocho variantes (RN/CNN x ASCON/PLAIN x NoFOG/FOG) sobre 58 intentos y se cuantifica el overhead de seguridad sobre el ciclo federado. Resultados: accuracy global de 0.975 en CNN_ASCON_FOG (mejor configuracion), 0.963 en RN_ASCON_FOG y 0.946 promedio agregado de las 8 variantes. ASCON-128 mejora la accuracy +3.2 puntos respecto al baseline PLAIN (filtrado implicito de mensajes corruptos), con un overhead temporal inferior al 0.27% del tiempo de ronda y un costo de tamano del 48% por mensaje, validando una arquitectura operativa, replicable y segura para IDS IoT.</a:t>
             </a:r>
             <a:endParaRPr lang="es-CO"/>
           </a:p>
@@ -17029,7 +17029,7 @@
           <a:p>
             <a:r>
               <a:rPr lang="es-CO"/>
-              <a:t>Nicolas Camargo</a:t>
+              <a:t>Nicolas Casas Ibarra</a:t>
             </a:r>
             <a:endParaRPr lang="es-CO"/>
           </a:p>
@@ -17052,7 +17052,7 @@
           <a:p>
             <a:r>
               <a:rPr lang="es-CO"/>
-              <a:t>n.camargo@uniandes.edu.co</a:t>
+              <a:t>ni.casas@uniandes.edu.co</a:t>
             </a:r>
             <a:endParaRPr lang="es-CO"/>
           </a:p>
@@ -17290,7 +17290,7 @@
         <p:spPr/>
         <p:txBody>
           <a:bodyPr>
-            <a:normAutofit fontScale="90000" lnSpcReduction="10000"/>
+            <a:normAutofit fontScale="85000" lnSpcReduction="15000"/>
           </a:bodyPr>
           <a:lstStyle/>
           <a:p>
@@ -17304,7 +17304,7 @@
             </a:r>
             <a:r>
               <a:rPr lang="es-CO"/>
-              <a:t>Random Forest 0.9994, SVM-RBF 0.9968 (no caben en MCU); Decision Tree 0.9987 (~15 KB).</a:t>
+              <a:t>Random Forest 0.9994, SVM-RBF 0.9968 (no caben en MCU); Decision Tree 0.9987 (~15 KB); MLP propuesto ~4.5 KB.</a:t>
             </a:r>
           </a:p>
           <a:p>
@@ -17314,11 +17314,11 @@
             </a:pPr>
             <a:r>
               <a:rPr lang="es-CO" b="1"/>
-              <a:t xml:space="preserve">HFL en hardware: </a:t>
+              <a:t xml:space="preserve">8 variantes en hardware (58 intentos): </a:t>
             </a:r>
             <a:r>
               <a:rPr lang="es-CO"/>
-              <a:t>RN+ASCON 0.9463 (loss 0.1415, ronda 61.25 s); RN sin ASCON 0.9298; CNN-1D + FOG + ASCON 0.9750 (loss 0.0910).</a:t>
+              <a:t>CNN_ASCON_FOG 0.9750 (mejor); CNN_ASCON_NoFOG 0.9604; RN_ASCON_FOG 0.9633; RN_ASCON_NoFOG 0.9381; CNN_PLAIN_FOG 0.9444; CNN_PLAIN_NoFOG 0.9389; RN_PLAIN_NoFOG 0.9298; RN_PLAIN_FOG 0.9000.</a:t>
             </a:r>
           </a:p>
           <a:p>
@@ -17328,11 +17328,11 @@
             </a:pPr>
             <a:r>
               <a:rPr lang="es-CO" b="1"/>
-              <a:t xml:space="preserve">Privacidad: </a:t>
+              <a:t xml:space="preserve">ASCON mejora la accuracy: </a:t>
             </a:r>
             <a:r>
               <a:rPr lang="es-CO"/>
-              <a:t>se comparten solo 163 parametros (~652 B) por ronda en lugar de ~13.3 M de valores crudos (reduccion &gt;99.99%).</a:t>
+              <a:t>+3.2 pts promedio frente a PLAIN (0.9592 vs 0.9272). El tag autenticado actua como filtro implicito de mensajes corruptos.</a:t>
             </a:r>
           </a:p>
           <a:p>
@@ -17342,11 +17342,11 @@
             </a:pPr>
             <a:r>
               <a:rPr lang="es-CO" b="1"/>
-              <a:t xml:space="preserve">Overhead ASCON-128: </a:t>
+              <a:t xml:space="preserve">FOG con/sin ASCON: </a:t>
             </a:r>
             <a:r>
               <a:rPr lang="es-CO"/>
-              <a:t>~14 ms por operacion en PC (Python), ~100-300 us en ESP32 (C++). Total ~42 ms por ronda = ~0.06% del ciclo. Tamano: +36% por mensaje (~1.3 KB).</a:t>
+              <a:t>FOG mejora CNN (+1.5 pts ASCON, +0.6 pts PLAIN) y RN+ASCON (+2.5 pts), pero degrada RN_PLAIN_FOG (-3 pts). La integridad de canal habilita la pre-agregacion.</a:t>
             </a:r>
           </a:p>
           <a:p>
@@ -17356,41 +17356,45 @@
             </a:pPr>
             <a:r>
               <a:rPr lang="es-CO" b="1"/>
-              <a:t xml:space="preserve">Convergencia: </a:t>
+              <a:t xml:space="preserve">Privacidad: </a:t>
             </a:r>
             <a:r>
               <a:rPr lang="es-CO"/>
-              <a:t>~20-30 rondas para superar 85% de accuracy; sin degradacion observable al activar ASCON.</a:t>
-            </a:r>
-          </a:p>
-        </p:txBody>
-      </p:sp>
-      <p:sp>
-        <p:nvSpPr>
-          <p:cNvPr id="20" name="19 Conclusiones contenido"/>
-          <p:cNvSpPr>
-            <a:spLocks noGrp="1"/>
-          </p:cNvSpPr>
-          <p:nvPr>
-            <p:ph sz="quarter" idx="39"/>
-          </p:nvPr>
-        </p:nvSpPr>
-        <p:spPr/>
-        <p:txBody>
-          <a:bodyPr>
-            <a:normAutofit fontScale="92500" lnSpcReduction="10000"/>
-          </a:bodyPr>
-          <a:lstStyle/>
+              <a:t>se comparten solo 163 parametros (~652 B) por ronda en lugar de ~13.3 M de valores crudos (reduccion &gt;99.99%).</a:t>
+            </a:r>
+          </a:p>
           <a:p>
             <a:pPr marL="285750" indent="-285750">
               <a:buFont typeface="Arial" panose="020B0604020202020204" pitchFamily="34" charset="0"/>
               <a:buChar char="-"/>
             </a:pPr>
             <a:r>
+              <a:rPr lang="es-CO" b="1"/>
+              <a:t xml:space="preserve">Overhead ASCON-128: </a:t>
+            </a:r>
+            <a:r>
               <a:rPr lang="es-CO"/>
-              <a:t>Un MLP de 4.5 KB en ESP32-S3 detecta trafico MQTT malicioso con accuracy operativa (90-97%) viable para alerta temprana.</a:t>
-            </a:r>
-          </a:p>
+              <a:t>p95 ~4.5 ms en ESP32 (C++) y 25-50 ms en PC (Python). Total 0.10-0.27% del ciclo FL. Tamano: +48% por mensaje (~1.07 KB absolutos).</a:t>
+            </a:r>
+          </a:p>
+        </p:txBody>
+      </p:sp>
+      <p:sp>
+        <p:nvSpPr>
+          <p:cNvPr id="20" name="19 Conclusiones contenido"/>
+          <p:cNvSpPr>
+            <a:spLocks noGrp="1"/>
+          </p:cNvSpPr>
+          <p:nvPr>
+            <p:ph sz="quarter" idx="39"/>
+          </p:nvPr>
+        </p:nvSpPr>
+        <p:spPr/>
+        <p:txBody>
+          <a:bodyPr>
+            <a:normAutofit fontScale="92500" lnSpcReduction="10000"/>
+          </a:bodyPr>
+          <a:lstStyle/>
           <a:p>
             <a:pPr marL="285750" indent="-285750">
               <a:buFont typeface="Arial" panose="020B0604020202020204" pitchFamily="34" charset="0"/>
@@ -17398,7 +17402,7 @@
             </a:pPr>
             <a:r>
               <a:rPr lang="es-CO"/>
-              <a:t>HFL bidireccional reduce &gt;99.99% el intercambio de datos sensibles con una penalizacion de ~7 puntos de accuracy.</a:t>
+              <a:t>TinyML viable: MLP de 4.5 KB y CNN-1D federada en ESP32-S3 alcanzan acc 0.93-0.97 (CNN_ASCON_FOG: 0.975) sobre 58 intentos en hardware real.</a:t>
             </a:r>
           </a:p>
           <a:p>
@@ -17408,7 +17412,7 @@
             </a:pPr>
             <a:r>
               <a:rPr lang="es-CO"/>
-              <a:t>El overhead temporal de ASCON-128 es despreciable (&lt;0.1% del ciclo) y el de tamano (~36% por mensaje) es asumible para redes IoT.</a:t>
+              <a:t>HFL bidireccional reduce &gt;99.99% el intercambio de datos sensibles con una penalizacion de 2-3 puntos en la mejor variante (CNN_ASCON_FOG vs Random Forest).</a:t>
             </a:r>
           </a:p>
           <a:p>
@@ -17418,7 +17422,17 @@
             </a:pPr>
             <a:r>
               <a:rPr lang="es-CO"/>
-              <a:t>El modo FOG con CNN-1D obtiene los mejores resultados (acc 0.975, loss 0.091) sin alterar el contrato bidireccional Edge-Fog-Cloud.</a:t>
+              <a:t>ASCON-128 no solo no degrada: mejora la accuracy +3.2 pts vs PLAIN (filtrado implicito de mensajes corruptos). Overhead: 0.10-0.27% del ciclo y +48% por mensaje.</a:t>
+            </a:r>
+          </a:p>
+          <a:p>
+            <a:pPr marL="285750" indent="-285750">
+              <a:buFont typeface="Arial" panose="020B0604020202020204" pitchFamily="34" charset="0"/>
+              <a:buChar char="-"/>
+            </a:pPr>
+            <a:r>
+              <a:rPr lang="es-CO"/>
+              <a:t>FOG con ASCON gana (+1.5 a +2.5 pts), pero FOG sin ASCON degrada RN (-3 pts): la integridad de canal es condicion habilitante de la pre-agregacion fog.</a:t>
             </a:r>
           </a:p>
           <a:p>

--- a/src/Documento_Final/Rev1__Tesis_Sistemas_Uniandes_2/Poster_Tesis_HFL_v7_Uniandes.pptx
+++ b/src/Documento_Final/Rev1__Tesis_Sistemas_Uniandes_2/Poster_Tesis_HFL_v7_Uniandes.pptx
@@ -16787,7 +16787,7 @@
           <a:p>
             <a:r>
               <a:rPr lang="es-CO" b="1" dirty="0"/>
-              <a:t>Sistema de Deteccion de Intrusiones IoT/MQTT mediante Aprendizaje Federado Jerarquico (HFL) y Cifrado Ligero ASCON-128 sobre Arquitectura Edge-Fog-Cloud</a:t>
+              <a:t>Sistema de deteccion de intrusiones para redes IoT mediante TinyML, aprendizaje federado jerarquico y cifrado ligero ASCON-128 en una arquitectura Edge-Fog-Cloud</a:t>
             </a:r>
             <a:endParaRPr lang="es-CO" dirty="0"/>
           </a:p>
@@ -16834,8 +16834,8 @@
           <a:lstStyle/>
           <a:p>
             <a:r>
-              <a:rPr lang="es-CO"/>
-              <a:t>Se disena, implementa y evalua un Sistema de Deteccion de Intrusiones (IDS) para trafico IoT/MQTT desplegado sobre una arquitectura jerarquica Edge-Fog-Cloud (ESP32-S3 + Raspberry Pi 4 + PC). Los nodos edge ejecutan inferencia TinyML sobre 13 features de flujo y publican datos al gateway; el gateway entrena localmente y reporta pesos al PC, que coordina rondas de FedAvg. Todas las comunicaciones MQTT/HTTP se protegen con ASCON-128 (estandar NIST de criptografia ligera). Se comparan ocho variantes (RN/CNN x ASCON/PLAIN x NoFOG/FOG) sobre 58 intentos y se cuantifica el overhead de seguridad sobre el ciclo federado. Resultados: accuracy global de 0.975 en CNN_ASCON_FOG (mejor configuracion), 0.963 en RN_ASCON_FOG y 0.946 promedio agregado de las 8 variantes. ASCON-128 mejora la accuracy +3.2 puntos respecto al baseline PLAIN (filtrado implicito de mensajes corruptos), con un overhead temporal inferior al 0.27% del tiempo de ronda y un costo de tamano del 48% por mensaje, validando una arquitectura operativa, replicable y segura para IDS IoT.</a:t>
+              <a:rPr sz="2800" b="0"/>
+              <a:t>Sistema de Deteccion de Intrusiones (IDS) para trafico IoT/MQTT en arquitectura jerarquica Edge-Fog-Cloud (ESP32-S3 + Raspberry Pi 4 + PC). Combina TinyML, HFL bidireccional y ASCON-128 (estandar NIST). Se evaluan 8 variantes (RN/CNN x ASCON/PLAIN x NoFOG/FOG) sobre 58 intentos en hardware real. Mejor resultado: CNN_ASCON_FOG con accuracy 0.975 y loss 0.091.</a:t>
             </a:r>
             <a:endParaRPr lang="es-CO"/>
           </a:p>
@@ -17029,7 +17029,7 @@
           <a:p>
             <a:r>
               <a:rPr lang="es-CO"/>
-              <a:t>Nicolas Casas Ibarra</a:t>
+              <a:t>Santiago Alejandro Jaimes Puerto, Nicolas Casas Ibarra</a:t>
             </a:r>
             <a:endParaRPr lang="es-CO"/>
           </a:p>
@@ -17052,7 +17052,7 @@
           <a:p>
             <a:r>
               <a:rPr lang="es-CO"/>
-              <a:t>ni.casas@uniandes.edu.co</a:t>
+              <a:t>sa.jaimesp@uniandes.edu.co, ni.casas@uniandes.edu.co</a:t>
             </a:r>
             <a:endParaRPr lang="es-CO"/>
           </a:p>
@@ -17075,7 +17075,7 @@
           <a:p>
             <a:r>
               <a:rPr lang="es-CO"/>
-              <a:t>Asesor: &lt;asesor&gt; (&lt;correo asesor&gt;@uniandes.edu.co)</a:t>
+              <a:t>Asesor: Prof. Carlos Andres Lozano Garzon, PhD  (calozanog@uniandes.edu.co)</a:t>
             </a:r>
             <a:endParaRPr lang="es-CO"/>
           </a:p>
@@ -17099,10 +17099,46 @@
           <a:lstStyle/>
           <a:p>
             <a:r>
-              <a:rPr lang="es-CO"/>
-              <a:t>Las redes IoT/IIoT amplian la superficie de ataque pero los IDS clasicos asumen centralizacion de datos, servidores potentes y comunicaciones sin cifrado, supuestos incompatibles con microcontroladores. Se identifican tres brechas: viabilidad de despliegue en MCU, privacidad de datos de trafico y seguridad del ciclo federado. Esta tesis las aborda integrando TinyML, HFL bidireccional y ASCON-128 (estandar NIST de criptografia ligera, 2023) sobre una arquitectura Edge-Fog-Cloud real, evitando el uso de permutaciones ad-hoc previamente comprometidas.</a:t>
+              <a:rPr sz="2800" b="1"/>
+              <a:t>Tres brechas atacadas:</a:t>
             </a:r>
             <a:endParaRPr lang="es-CO"/>
+          </a:p>
+          <a:p>
+            <a:r>
+              <a:rPr sz="2800" b="1"/>
+              <a:t>Viabilidad: </a:t>
+            </a:r>
+            <a:r>
+              <a:rPr sz="2800" b="0"/>
+              <a:t>modelos de alta precision (RF, SVM-RBF) no caben en MCUs.</a:t>
+            </a:r>
+          </a:p>
+          <a:p>
+            <a:r>
+              <a:rPr sz="2800" b="1"/>
+              <a:t>Privacidad: </a:t>
+            </a:r>
+            <a:r>
+              <a:rPr sz="2800" b="0"/>
+              <a:t>centralizar PCAPs es costoso y arriesgado.</a:t>
+            </a:r>
+          </a:p>
+          <a:p>
+            <a:r>
+              <a:rPr sz="2800" b="1"/>
+              <a:t>Seguridad: </a:t>
+            </a:r>
+            <a:r>
+              <a:rPr sz="2800" b="0"/>
+              <a:t>los pesos federados deben protegerse en transito.</a:t>
+            </a:r>
+          </a:p>
+          <a:p>
+            <a:r>
+              <a:rPr sz="2800" b="0"/>
+              <a:t>ASCON-128 (NIST 2023) frente a permutaciones ad-hoc vulnerables.</a:t>
+            </a:r>
           </a:p>
         </p:txBody>
       </p:sp>
@@ -17128,325 +17164,392 @@
               <a:buChar char="-"/>
             </a:pPr>
             <a:r>
-              <a:rPr lang="es-CO"/>
-              <a:t>General: disenar, implementar y evaluar un IDS IoT/MQTT con TinyML, HFL jerarquico y ASCON-128 sobre ESP32-S3, Raspberry Pi 4 y PC.</a:t>
-            </a:r>
-          </a:p>
+              <a:rPr sz="2800" b="1"/>
+              <a:t>General: </a:t>
+            </a:r>
+            <a:r>
+              <a:rPr sz="2800" b="0"/>
+              <a:t>Disenar, implementar y evaluar un IDS IoT/MQTT con TinyML, HFL y ASCON-128.</a:t>
+            </a:r>
+          </a:p>
+          <a:p>
+            <a:r>
+              <a:rPr sz="2800" b="1"/>
+              <a:t>Especificos:</a:t>
+            </a:r>
+          </a:p>
+          <a:p>
+            <a:r>
+              <a:rPr sz="2800" b="0"/>
+              <a:t>- Pipeline de 13 features de flujo, 3 clases (normal, mqtt_bruteforce, scan_A).</a:t>
+            </a:r>
+          </a:p>
+          <a:p>
+            <a:r>
+              <a:rPr sz="2800" b="0"/>
+              <a:t>- Comparar MLP, CNN-1D, Residual MLP y Tiny Transformer.</a:t>
+            </a:r>
+          </a:p>
+          <a:p>
+            <a:r>
+              <a:rPr sz="2800" b="0"/>
+              <a:t>- Implementar HFL bidireccional con/sin ASCON-128.</a:t>
+            </a:r>
+          </a:p>
+          <a:p>
+            <a:r>
+              <a:rPr sz="2800" b="0"/>
+              <a:t>- Evaluar variantes RN, CNN-1D y modo FOG (lider/peer) en hardware.</a:t>
+            </a:r>
+          </a:p>
+        </p:txBody>
+      </p:sp>
+      <p:sp>
+        <p:nvSpPr>
+          <p:cNvPr id="17" name="16 Diseno contenido"/>
+          <p:cNvSpPr>
+            <a:spLocks noGrp="1"/>
+          </p:cNvSpPr>
+          <p:nvPr>
+            <p:ph sz="quarter" idx="36"/>
+          </p:nvPr>
+        </p:nvSpPr>
+        <p:spPr>
+          <a:xfrm>
+            <a:off x="13393663" y="12313568"/>
+            <a:ext cx="11520000" cy="2620859"/>
+          </a:xfrm>
+        </p:spPr>
+        <p:txBody>
+          <a:bodyPr>
+            <a:normAutofit fontScale="90000" lnSpcReduction="10000"/>
+          </a:bodyPr>
+          <a:lstStyle/>
+          <a:p>
+            <a:r>
+              <a:rPr sz="2800" b="1"/>
+              <a:t>Arquitectura Edge / Fog / Cloud:</a:t>
+            </a:r>
+          </a:p>
+          <a:p>
+            <a:r>
+              <a:rPr sz="2800" b="1"/>
+              <a:t>Edge: </a:t>
+            </a:r>
+            <a:r>
+              <a:rPr sz="2800" b="0"/>
+              <a:t>ESP32-S3 -&gt; features + inferencia TinyML.</a:t>
+            </a:r>
+          </a:p>
+          <a:p>
+            <a:r>
+              <a:rPr sz="2800" b="1"/>
+              <a:t>Fog: </a:t>
+            </a:r>
+            <a:r>
+              <a:rPr sz="2800" b="0"/>
+              <a:t>RPi 4 -&gt; broker MQTT + entrenamiento local.</a:t>
+            </a:r>
+          </a:p>
+          <a:p>
+            <a:r>
+              <a:rPr sz="2800" b="1"/>
+              <a:t>Cloud: </a:t>
+            </a:r>
+            <a:r>
+              <a:rPr sz="2800" b="0"/>
+              <a:t>PC -&gt; FastAPI + FedAvg ponderado.</a:t>
+            </a:r>
+          </a:p>
+          <a:p>
+            <a:r>
+              <a:rPr sz="2800" b="1"/>
+              <a:t>FOG: </a:t>
+            </a:r>
+            <a:r>
+              <a:rPr sz="2800" b="0"/>
+              <a:t>leader+peer con fog/weights y fog/global_model.</a:t>
+            </a:r>
+          </a:p>
+          <a:p>
+            <a:r>
+              <a:rPr sz="2800" b="0"/>
+              <a:t>ASCON-128 sobre los 4 canales (envelope JSON).</a:t>
+            </a:r>
+          </a:p>
+        </p:txBody>
+      </p:sp>
+      <p:sp>
+        <p:nvSpPr>
+          <p:cNvPr id="18" name="17 Metodologia contenido"/>
+          <p:cNvSpPr>
+            <a:spLocks noGrp="1"/>
+          </p:cNvSpPr>
+          <p:nvPr>
+            <p:ph sz="quarter" idx="37"/>
+          </p:nvPr>
+        </p:nvSpPr>
+        <p:spPr>
+          <a:xfrm>
+            <a:off x="648247" y="24482970"/>
+            <a:ext cx="11520000" cy="3863199"/>
+          </a:xfrm>
+        </p:spPr>
+        <p:txBody>
+          <a:bodyPr>
+            <a:normAutofit fontScale="92500" lnSpcReduction="10000"/>
+          </a:bodyPr>
+          <a:lstStyle/>
+          <a:p>
+            <a:r>
+              <a:rPr sz="2800" b="1"/>
+              <a:t>Protocolo HFL bidireccional en 3 fases:</a:t>
+            </a:r>
+            <a:endParaRPr lang="es-CO"/>
+          </a:p>
+          <a:p>
+            <a:r>
+              <a:rPr sz="2800" b="1"/>
+              <a:t>1) Top-Down: </a:t>
+            </a:r>
+            <a:r>
+              <a:rPr sz="2800" b="0"/>
+              <a:t>PC -&gt; RPi -&gt; ESP32 (modelo global).</a:t>
+            </a:r>
+          </a:p>
+          <a:p>
+            <a:r>
+              <a:rPr sz="2800" b="1"/>
+              <a:t>2) Local: </a:t>
+            </a:r>
+            <a:r>
+              <a:rPr sz="2800" b="0"/>
+              <a:t>ESP32 publica features, RPi etiqueta y entrena.</a:t>
+            </a:r>
+          </a:p>
+          <a:p>
+            <a:r>
+              <a:rPr sz="2800" b="1"/>
+              <a:t>3) Bottom-Up: </a:t>
+            </a:r>
+            <a:r>
+              <a:rPr sz="2800" b="0"/>
+              <a:t>RPi reporta pesos, PC ejecuta FedAvg.</a:t>
+            </a:r>
+          </a:p>
+          <a:p>
+            <a:r>
+              <a:rPr sz="2800" b="0"/>
+              <a:t>Buffer N=30 muestras, 5 epocas, batch 8, Adam (lr=0.005).</a:t>
+            </a:r>
+          </a:p>
+          <a:p>
+            <a:r>
+              <a:rPr sz="2800" b="0"/>
+              <a:t>Modelo de amenazas explicito: confidencialidad, integridad y replay.</a:t>
+            </a:r>
+          </a:p>
+        </p:txBody>
+      </p:sp>
+      <p:sp>
+        <p:nvSpPr>
+          <p:cNvPr id="19" name="18 Resultados contenido"/>
+          <p:cNvSpPr>
+            <a:spLocks noGrp="1"/>
+          </p:cNvSpPr>
+          <p:nvPr>
+            <p:ph sz="quarter" idx="38"/>
+          </p:nvPr>
+        </p:nvSpPr>
+        <p:spPr>
+          <a:xfrm>
+            <a:off x="13393663" y="20594488"/>
+            <a:ext cx="11520000" cy="3340939"/>
+          </a:xfrm>
+        </p:spPr>
+        <p:txBody>
+          <a:bodyPr>
+            <a:normAutofit fontScale="85000" lnSpcReduction="15000"/>
+          </a:bodyPr>
+          <a:lstStyle/>
           <a:p>
             <a:pPr marL="285750" indent="-285750">
               <a:buFont typeface="Arial" panose="020B0604020202020204" pitchFamily="34" charset="0"/>
               <a:buChar char="-"/>
             </a:pPr>
             <a:r>
-              <a:rPr lang="es-CO"/>
-              <a:t>Construir un pipeline de 13 features de flujo y problema triclase (normal, mqtt_bruteforce, scan_A).</a:t>
-            </a:r>
-          </a:p>
+              <a:rPr sz="2800" b="1"/>
+              <a:t>Hallazgos clave (58 intentos sobre hardware):</a:t>
+            </a:r>
+          </a:p>
+          <a:p>
+            <a:r>
+              <a:rPr sz="2800" b="1"/>
+              <a:t>CNN_ASCON_FOG: </a:t>
+            </a:r>
+            <a:r>
+              <a:rPr sz="2800" b="0"/>
+              <a:t>acc 0.975, loss 0.091 (mejor variante).</a:t>
+            </a:r>
+          </a:p>
+          <a:p>
+            <a:r>
+              <a:rPr sz="2800" b="0"/>
+              <a:t>ASCON mejora la accuracy +3.2 pts vs PLAIN.</a:t>
+            </a:r>
+          </a:p>
+          <a:p>
+            <a:r>
+              <a:rPr sz="2800" b="0"/>
+              <a:t>Overhead temporal ASCON: 0.10-0.27% del ciclo FL.</a:t>
+            </a:r>
+          </a:p>
+          <a:p>
+            <a:r>
+              <a:rPr sz="2800" b="0"/>
+              <a:t>Overhead de tamano: +48% por mensaje (~1.07 KB).</a:t>
+            </a:r>
+          </a:p>
+          <a:p>
+            <a:r>
+              <a:rPr sz="2800" b="0"/>
+              <a:t>Convergencia &gt;0.90 en 5-10 rondas.</a:t>
+            </a:r>
+          </a:p>
+        </p:txBody>
+      </p:sp>
+      <p:sp>
+        <p:nvSpPr>
+          <p:cNvPr id="20" name="19 Conclusiones contenido"/>
+          <p:cNvSpPr>
+            <a:spLocks noGrp="1"/>
+          </p:cNvSpPr>
+          <p:nvPr>
+            <p:ph sz="quarter" idx="39"/>
+          </p:nvPr>
+        </p:nvSpPr>
+        <p:spPr/>
+        <p:txBody>
+          <a:bodyPr>
+            <a:normAutofit fontScale="92500" lnSpcReduction="10000"/>
+          </a:bodyPr>
+          <a:lstStyle/>
           <a:p>
             <a:pPr marL="285750" indent="-285750">
               <a:buFont typeface="Arial" panose="020B0604020202020204" pitchFamily="34" charset="0"/>
               <a:buChar char="-"/>
             </a:pPr>
             <a:r>
-              <a:rPr lang="es-CO"/>
-              <a:t>Comparar MLP, CNN-1D, Residual MLP y Tiny Transformer y exportar pesos al ESP32.</a:t>
-            </a:r>
-          </a:p>
-          <a:p>
-            <a:pPr marL="285750" indent="-285750">
-              <a:buFont typeface="Arial" panose="020B0604020202020204" pitchFamily="34" charset="0"/>
-              <a:buChar char="-"/>
-            </a:pPr>
-            <a:r>
-              <a:rPr lang="es-CO"/>
-              <a:t>Implementar HFL bidireccional con ASCON-128 y baseline sin cifrado para medir overhead.</a:t>
-            </a:r>
-          </a:p>
-          <a:p>
-            <a:pPr marL="285750" indent="-285750">
-              <a:buFont typeface="Arial" panose="020B0604020202020204" pitchFamily="34" charset="0"/>
-              <a:buChar char="-"/>
-            </a:pPr>
-            <a:r>
-              <a:rPr lang="es-CO"/>
-              <a:t>Evaluar variantes RN, CNN-1D y modo FOG (lider/peer) sobre hardware real.</a:t>
-            </a:r>
-          </a:p>
-        </p:txBody>
-      </p:sp>
-      <p:sp>
-        <p:nvSpPr>
-          <p:cNvPr id="17" name="16 Diseno contenido"/>
-          <p:cNvSpPr>
-            <a:spLocks noGrp="1"/>
-          </p:cNvSpPr>
-          <p:nvPr>
-            <p:ph sz="quarter" idx="36"/>
-          </p:nvPr>
-        </p:nvSpPr>
-        <p:spPr/>
-        <p:txBody>
-          <a:bodyPr>
-            <a:normAutofit fontScale="90000" lnSpcReduction="10000"/>
-          </a:bodyPr>
-          <a:lstStyle/>
-          <a:p>
-            <a:r>
-              <a:rPr lang="es-CO" b="1"/>
-              <a:t xml:space="preserve">Edge (ESP32-S3): </a:t>
-            </a:r>
-            <a:r>
-              <a:rPr lang="es-CO"/>
-              <a:t>genera/captura trafico MQTT, extrae 13 features de flujo y ejecuta inferencia TinyML del MLP (1.139 parametros, ~4.5 KB) o CNN-1D.</a:t>
-            </a:r>
-          </a:p>
-          <a:p>
-            <a:r>
-              <a:rPr lang="es-CO" b="1"/>
-              <a:t xml:space="preserve">Fog (Raspberry Pi 4): </a:t>
-            </a:r>
-            <a:r>
-              <a:rPr lang="es-CO"/>
-              <a:t>broker MQTT, etiquetado heuristico, buffer de 40 muestras, entrenamiento local (5 epocas, batch 8, Adam lr=0.005) y reenvio de pesos.</a:t>
-            </a:r>
-          </a:p>
-          <a:p>
-            <a:r>
-              <a:rPr lang="es-CO" b="1"/>
-              <a:t xml:space="preserve">Cloud (PC): </a:t>
-            </a:r>
-            <a:r>
-              <a:rPr lang="es-CO"/>
-              <a:t>FastAPI + FedAvg ponderado por muestras, dashboard analitico Chart.js.</a:t>
-            </a:r>
-          </a:p>
-          <a:p>
-            <a:r>
-              <a:rPr lang="es-CO" b="1"/>
-              <a:t xml:space="preserve">ASCON-128: </a:t>
-            </a:r>
-            <a:r>
-              <a:rPr lang="es-CO"/>
-              <a:t>AEAD (clave 128 b, nonce 128 b, tag 128 b) en C++ (ESP32) y Python (RPi/PC), interoperables. Envelope JSON {ct, tag, nonce} en Base64. Validacion de tag obligatoria.</a:t>
-            </a:r>
-          </a:p>
-          <a:p>
-            <a:r>
-              <a:rPr lang="es-CO" b="1"/>
-              <a:t xml:space="preserve">Modo FOG: </a:t>
-            </a:r>
-            <a:r>
-              <a:rPr lang="es-CO"/>
-              <a:t>una RPi lider hace FedAvg de gateways peers via MQTT (fog/weights, fog/global_model) y reporta al PC (/aggregate-from-fog).</a:t>
-            </a:r>
-          </a:p>
-          <a:p>
-            <a:r>
-              <a:rPr lang="es-CO" b="1"/>
-              <a:t xml:space="preserve">Variantes evaluadas: </a:t>
-            </a:r>
-            <a:r>
-              <a:rPr lang="es-CO"/>
-              <a:t>hfl_v7-RN (MLP+ASCON), hfl_v7-no-ascon-RN (baseline JSON plano), hfl_v7-CNN (CNN-1D, estandar y FOG).</a:t>
-            </a:r>
-          </a:p>
-        </p:txBody>
-      </p:sp>
-      <p:sp>
-        <p:nvSpPr>
-          <p:cNvPr id="18" name="17 Metodologia contenido"/>
-          <p:cNvSpPr>
-            <a:spLocks noGrp="1"/>
-          </p:cNvSpPr>
-          <p:nvPr>
-            <p:ph sz="quarter" idx="37"/>
-          </p:nvPr>
-        </p:nvSpPr>
-        <p:spPr/>
-        <p:txBody>
-          <a:bodyPr>
-            <a:normAutofit fontScale="92500" lnSpcReduction="10000"/>
-          </a:bodyPr>
-          <a:lstStyle/>
-          <a:p>
-            <a:r>
-              <a:rPr lang="es-CO"/>
-              <a:t>Investigacion experimental cuantitativa en seis fases: (1) construccion del pipeline de 13 features y triclase; (2) entrenamiento offline comparativo de MLP, CNN-1D, Residual MLP y Tiny Transformer; (3) implementacion del HFL bidireccional sobre ESP32 + RPi + PC; (4) integracion de ASCON-128 sobre los 4 canales (ESP32&lt;-&gt;RPi via MQTT, RPi&lt;-&gt;PC via HTTP); (5) baseline funcionalmente equivalente sin cifrado para aislar el costo de seguridad; (6) evaluacion de variantes RN, CNN-1D y modo FOG, con metricas de accuracy/loss, costo de comunicacion, tiempos de cifrado y duracion de ronda. Modelo de amenazas explicito: confidencialidad, integridad y replay; quedan fuera del alcance clientes bizantinos, ataques de canal lateral e inferencia de membresia.</a:t>
-            </a:r>
-            <a:endParaRPr lang="es-CO"/>
-          </a:p>
-        </p:txBody>
-      </p:sp>
-      <p:sp>
-        <p:nvSpPr>
-          <p:cNvPr id="19" name="18 Resultados contenido"/>
-          <p:cNvSpPr>
-            <a:spLocks noGrp="1"/>
-          </p:cNvSpPr>
-          <p:nvPr>
-            <p:ph sz="quarter" idx="38"/>
-          </p:nvPr>
-        </p:nvSpPr>
-        <p:spPr/>
-        <p:txBody>
-          <a:bodyPr>
-            <a:normAutofit fontScale="85000" lnSpcReduction="15000"/>
-          </a:bodyPr>
-          <a:lstStyle/>
-          <a:p>
-            <a:pPr marL="285750" indent="-285750">
-              <a:buFont typeface="Arial" panose="020B0604020202020204" pitchFamily="34" charset="0"/>
-              <a:buChar char="-"/>
-            </a:pPr>
-            <a:r>
-              <a:rPr lang="es-CO" b="1"/>
-              <a:t xml:space="preserve">Centralizado (techo): </a:t>
-            </a:r>
-            <a:r>
-              <a:rPr lang="es-CO"/>
-              <a:t>Random Forest 0.9994, SVM-RBF 0.9968 (no caben en MCU); Decision Tree 0.9987 (~15 KB); MLP propuesto ~4.5 KB.</a:t>
-            </a:r>
-          </a:p>
-          <a:p>
-            <a:pPr marL="285750" indent="-285750">
-              <a:buFont typeface="Arial" panose="020B0604020202020204" pitchFamily="34" charset="0"/>
-              <a:buChar char="-"/>
-            </a:pPr>
-            <a:r>
-              <a:rPr lang="es-CO" b="1"/>
-              <a:t xml:space="preserve">8 variantes en hardware (58 intentos): </a:t>
-            </a:r>
-            <a:r>
-              <a:rPr lang="es-CO"/>
-              <a:t>CNN_ASCON_FOG 0.9750 (mejor); CNN_ASCON_NoFOG 0.9604; RN_ASCON_FOG 0.9633; RN_ASCON_NoFOG 0.9381; CNN_PLAIN_FOG 0.9444; CNN_PLAIN_NoFOG 0.9389; RN_PLAIN_NoFOG 0.9298; RN_PLAIN_FOG 0.9000.</a:t>
-            </a:r>
-          </a:p>
-          <a:p>
-            <a:pPr marL="285750" indent="-285750">
-              <a:buFont typeface="Arial" panose="020B0604020202020204" pitchFamily="34" charset="0"/>
-              <a:buChar char="-"/>
-            </a:pPr>
-            <a:r>
-              <a:rPr lang="es-CO" b="1"/>
-              <a:t xml:space="preserve">ASCON mejora la accuracy: </a:t>
-            </a:r>
-            <a:r>
-              <a:rPr lang="es-CO"/>
-              <a:t>+3.2 pts promedio frente a PLAIN (0.9592 vs 0.9272). El tag autenticado actua como filtro implicito de mensajes corruptos.</a:t>
-            </a:r>
-          </a:p>
-          <a:p>
-            <a:pPr marL="285750" indent="-285750">
-              <a:buFont typeface="Arial" panose="020B0604020202020204" pitchFamily="34" charset="0"/>
-              <a:buChar char="-"/>
-            </a:pPr>
-            <a:r>
-              <a:rPr lang="es-CO" b="1"/>
-              <a:t xml:space="preserve">FOG con/sin ASCON: </a:t>
-            </a:r>
-            <a:r>
-              <a:rPr lang="es-CO"/>
-              <a:t>FOG mejora CNN (+1.5 pts ASCON, +0.6 pts PLAIN) y RN+ASCON (+2.5 pts), pero degrada RN_PLAIN_FOG (-3 pts). La integridad de canal habilita la pre-agregacion.</a:t>
-            </a:r>
-          </a:p>
-          <a:p>
-            <a:pPr marL="285750" indent="-285750">
-              <a:buFont typeface="Arial" panose="020B0604020202020204" pitchFamily="34" charset="0"/>
-              <a:buChar char="-"/>
-            </a:pPr>
-            <a:r>
-              <a:rPr lang="es-CO" b="1"/>
-              <a:t xml:space="preserve">Privacidad: </a:t>
-            </a:r>
-            <a:r>
-              <a:rPr lang="es-CO"/>
-              <a:t>se comparten solo 163 parametros (~652 B) por ronda en lugar de ~13.3 M de valores crudos (reduccion &gt;99.99%).</a:t>
-            </a:r>
-          </a:p>
-          <a:p>
-            <a:pPr marL="285750" indent="-285750">
-              <a:buFont typeface="Arial" panose="020B0604020202020204" pitchFamily="34" charset="0"/>
-              <a:buChar char="-"/>
-            </a:pPr>
-            <a:r>
-              <a:rPr lang="es-CO" b="1"/>
-              <a:t xml:space="preserve">Overhead ASCON-128: </a:t>
-            </a:r>
-            <a:r>
-              <a:rPr lang="es-CO"/>
-              <a:t>p95 ~4.5 ms en ESP32 (C++) y 25-50 ms en PC (Python). Total 0.10-0.27% del ciclo FL. Tamano: +48% por mensaje (~1.07 KB absolutos).</a:t>
-            </a:r>
-          </a:p>
-        </p:txBody>
-      </p:sp>
-      <p:sp>
-        <p:nvSpPr>
-          <p:cNvPr id="20" name="19 Conclusiones contenido"/>
-          <p:cNvSpPr>
-            <a:spLocks noGrp="1"/>
-          </p:cNvSpPr>
-          <p:nvPr>
-            <p:ph sz="quarter" idx="39"/>
-          </p:nvPr>
-        </p:nvSpPr>
-        <p:spPr/>
-        <p:txBody>
-          <a:bodyPr>
-            <a:normAutofit fontScale="92500" lnSpcReduction="10000"/>
-          </a:bodyPr>
-          <a:lstStyle/>
-          <a:p>
-            <a:pPr marL="285750" indent="-285750">
-              <a:buFont typeface="Arial" panose="020B0604020202020204" pitchFamily="34" charset="0"/>
-              <a:buChar char="-"/>
-            </a:pPr>
-            <a:r>
-              <a:rPr lang="es-CO"/>
-              <a:t>TinyML viable: MLP de 4.5 KB y CNN-1D federada en ESP32-S3 alcanzan acc 0.93-0.97 (CNN_ASCON_FOG: 0.975) sobre 58 intentos en hardware real.</a:t>
-            </a:r>
-          </a:p>
-          <a:p>
-            <a:pPr marL="285750" indent="-285750">
-              <a:buFont typeface="Arial" panose="020B0604020202020204" pitchFamily="34" charset="0"/>
-              <a:buChar char="-"/>
-            </a:pPr>
-            <a:r>
-              <a:rPr lang="es-CO"/>
-              <a:t>HFL bidireccional reduce &gt;99.99% el intercambio de datos sensibles con una penalizacion de 2-3 puntos en la mejor variante (CNN_ASCON_FOG vs Random Forest).</a:t>
-            </a:r>
-          </a:p>
-          <a:p>
-            <a:pPr marL="285750" indent="-285750">
-              <a:buFont typeface="Arial" panose="020B0604020202020204" pitchFamily="34" charset="0"/>
-              <a:buChar char="-"/>
-            </a:pPr>
-            <a:r>
-              <a:rPr lang="es-CO"/>
-              <a:t>ASCON-128 no solo no degrada: mejora la accuracy +3.2 pts vs PLAIN (filtrado implicito de mensajes corruptos). Overhead: 0.10-0.27% del ciclo y +48% por mensaje.</a:t>
-            </a:r>
-          </a:p>
-          <a:p>
-            <a:pPr marL="285750" indent="-285750">
-              <a:buFont typeface="Arial" panose="020B0604020202020204" pitchFamily="34" charset="0"/>
-              <a:buChar char="-"/>
-            </a:pPr>
-            <a:r>
-              <a:rPr lang="es-CO"/>
-              <a:t>FOG con ASCON gana (+1.5 a +2.5 pts), pero FOG sin ASCON degrada RN (-3 pts): la integridad de canal es condicion habilitante de la pre-agregacion fog.</a:t>
-            </a:r>
-          </a:p>
-          <a:p>
-            <a:pPr marL="285750" indent="-285750">
-              <a:buFont typeface="Arial" panose="020B0604020202020204" pitchFamily="34" charset="0"/>
-              <a:buChar char="-"/>
-            </a:pPr>
-            <a:r>
-              <a:rPr lang="es-CO"/>
-              <a:t>Trabajos futuros: robustez bizantina (Krum/FLTrust), cuantizacion INT8, contramedidas SCA sobre ASCON, datasets reales (CICIoT2023, TON_IoT) y differential privacy.</a:t>
-            </a:r>
-          </a:p>
-        </p:txBody>
-      </p:sp>
+              <a:rPr sz="2800" b="1"/>
+              <a:t>TinyML viable: </a:t>
+            </a:r>
+            <a:r>
+              <a:rPr sz="2800" b="0"/>
+              <a:t>0.93-0.97 acc en ESP32-S3.</a:t>
+            </a:r>
+          </a:p>
+          <a:p>
+            <a:r>
+              <a:rPr sz="2800" b="0"/>
+              <a:t>HFL reduce &gt;99.99% el intercambio de datos sensibles.</a:t>
+            </a:r>
+          </a:p>
+          <a:p>
+            <a:r>
+              <a:rPr sz="2800" b="0"/>
+              <a:t>ASCON-128 mejora la accuracy y filtra mensajes corruptos.</a:t>
+            </a:r>
+          </a:p>
+          <a:p>
+            <a:r>
+              <a:rPr sz="2800" b="0"/>
+              <a:t>FOG con ASCON gana; FOG sin ASCON degrada RN (-3 pts).</a:t>
+            </a:r>
+          </a:p>
+          <a:p>
+            <a:r>
+              <a:rPr sz="2800" b="1"/>
+              <a:t>Trabajo futuro: </a:t>
+            </a:r>
+            <a:r>
+              <a:rPr sz="2800" b="0"/>
+              <a:t>robustez bizantina, cuantizacion INT8, datasets reales.</a:t>
+            </a:r>
+          </a:p>
+        </p:txBody>
+      </p:sp>
+      <p:pic>
+        <p:nvPicPr>
+          <p:cNvPr id="21" name="Picture 20" descr="hfl_v7_architecture.png"/>
+          <p:cNvPicPr>
+            <a:picLocks noChangeAspect="1"/>
+          </p:cNvPicPr>
+          <p:nvPr/>
+        </p:nvPicPr>
+        <p:blipFill>
+          <a:blip r:embed="rId2"/>
+          <a:stretch>
+            <a:fillRect/>
+          </a:stretch>
+        </p:blipFill>
+        <p:spPr>
+          <a:xfrm>
+            <a:off x="16318561" y="15117307"/>
+            <a:ext cx="5670204" cy="3657600"/>
+          </a:xfrm>
+          <a:prstGeom prst="rect">
+            <a:avLst/>
+          </a:prstGeom>
+        </p:spPr>
+      </p:pic>
+      <p:pic>
+        <p:nvPicPr>
+          <p:cNvPr id="22" name="Picture 21" descr="hfl_v7_bidirectional_flow.png"/>
+          <p:cNvPicPr>
+            <a:picLocks noChangeAspect="1"/>
+          </p:cNvPicPr>
+          <p:nvPr/>
+        </p:nvPicPr>
+        <p:blipFill>
+          <a:blip r:embed="rId3"/>
+          <a:stretch>
+            <a:fillRect/>
+          </a:stretch>
+        </p:blipFill>
+        <p:spPr>
+          <a:xfrm>
+            <a:off x="2900433" y="28529049"/>
+            <a:ext cx="7015627" cy="5943600"/>
+          </a:xfrm>
+          <a:prstGeom prst="rect">
+            <a:avLst/>
+          </a:prstGeom>
+        </p:spPr>
+      </p:pic>
+      <p:pic>
+        <p:nvPicPr>
+          <p:cNvPr id="23" name="Picture 22" descr="global_accuracy_loss.png"/>
+          <p:cNvPicPr>
+            <a:picLocks noChangeAspect="1"/>
+          </p:cNvPicPr>
+          <p:nvPr/>
+        </p:nvPicPr>
+        <p:blipFill>
+          <a:blip r:embed="rId4"/>
+          <a:stretch>
+            <a:fillRect/>
+          </a:stretch>
+        </p:blipFill>
+        <p:spPr>
+          <a:xfrm>
+            <a:off x="14516418" y="24118307"/>
+            <a:ext cx="9274489" cy="3657600"/>
+          </a:xfrm>
+          <a:prstGeom prst="rect">
+            <a:avLst/>
+          </a:prstGeom>
+        </p:spPr>
+      </p:pic>
     </p:spTree>
     <p:extLst>
       <p:ext uri="{BB962C8B-B14F-4D97-AF65-F5344CB8AC3E}">
